--- a/slides/chapter_01_section_01_introduction/slides.pptx
+++ b/slides/chapter_01_section_01_introduction/slides.pptx
@@ -611,7 +611,7 @@
           <a:lstStyle/>
           <a:p>
             <a:r>
-              <a:t>Suppose for contradiction there were such a rational p. Then we could write p as m over n, where m and n are integers. Moreover, we can assume that m and n are not both even, because if they were, we could cancel common factors of 2 until at least one of them is odd. Now, if p squared equals 2, and p equals m over n, then squaring both sides gives m squared over n squared equals 2, which means m squared equals 2 n squared. This is equation 2 on the slide.</a:t>
+              <a:t>Suppose for contradiction there were such a rational "p". Then we could write "p" as "m" over "n", where "m" and "n" are integers. Moreover, we can assume that "m" and "n" are not both even, because if they were, we could cancel common factors of 2 until at least one of them is odd. Now, if "p" squared equals 2, and "p" equals "m" over "n", then squaring both sides gives "m" squared over "n" squared equals 2, which means "m" squared equals 2 "n" squared. This is equation 2 on the slide.</a:t>
             </a:r>
           </a:p>
         </p:txBody>
@@ -681,7 +681,7 @@
           <a:lstStyle/>
           <a:p>
             <a:r>
-              <a:t>Now we chase the consequences of equation 2. Since m squared equals 2 n squared, we see that m squared is even. But if m were odd, then m squared would also be odd. So m must be even. Let's see what this tells us about m squared.</a:t>
+              <a:t>Now we chase the consequences of equation 2. Since "m" squared equals 2 "n" squared, we see that "m" squared is even. But if "m" were odd, then "m" squared would also be odd. So "m" must be even. Let's see what this tells us about "m" squared.</a:t>
             </a:r>
           </a:p>
         </p:txBody>
@@ -751,7 +751,7 @@
           <a:lstStyle/>
           <a:p>
             <a:r>
-              <a:t>Since m is even, we can write m as 2 k for some integer k. Then m squared equals 4 k squared, which means m squared is divisible by 4, not just by 2. This extra factor of 2 is what we will exploit in the next step to show that n must also be even.</a:t>
+              <a:t>Since "m" is even, we can write "m" as 2 "k" for some integer "k". Then "m" squared equals 4 "k" squared, which means "m" squared is divisible by 4, not just by 2. This extra factor of 2 is what we will exploit in the next step to show that "n" must also be even.</a:t>
             </a:r>
           </a:p>
         </p:txBody>
@@ -821,7 +821,7 @@
           <a:lstStyle/>
           <a:p>
             <a:r>
-              <a:t>Looking back at equation 2, we have m squared equals 2 n squared, and since 4 divides m squared, it follows that 2 divides n squared. But then n squared is even, which forces n to be even as well.</a:t>
+              <a:t>Looking back at equation 2, we have "m" squared equals 2 "n" squared, and since 4 divides "m" squared, it follows that 2 divides "n" squared. But then "n" squared is even, which forces "n" to be even as well.</a:t>
             </a:r>
           </a:p>
         </p:txBody>
@@ -891,7 +891,7 @@
           <a:lstStyle/>
           <a:p>
             <a:r>
-              <a:t>So both m and n are even. But we specifically chose m and n so that they are not both even! This is a contradiction. Therefore, our assumption was wrong, and no rational p can satisfy p squared equals 2. The square root of 2 is irrational. Now let us examine this situation more closely.</a:t>
+              <a:t>So both "m" and "n" are even. But we specifically chose "m" and "n" so that they are not both even! This is a contradiction. Therefore, our assumption was wrong, and no rational "p" can satisfy "p" squared equals 2. The square root of 2 is irrational. Now let us examine this situation more closely.</a:t>
             </a:r>
           </a:p>
         </p:txBody>
@@ -961,7 +961,7 @@
           <a:lstStyle/>
           <a:p>
             <a:r>
-              <a:t>Now Rudin examines the situation more closely. He defines two sets of positive rationals. The set A consists of all positive rationals p whose square is less than 2, and the set B consists of all positive rationals p whose square is greater than 2. These sets partition the positive rationals into two groups: those to the left of the square root of 2, and those to the right.</a:t>
+              <a:t>Now Rudin examines the situation more closely. He defines two sets of positive rationals. The set "A" consists of all positive rationals "p" whose square is less than 2, and the set "B" consists of all positive rationals "p" whose square is greater than 2. These sets partition the positive rationals into two groups: those to the left of the square root of 2, and those to the right.</a:t>
             </a:r>
           </a:p>
         </p:txBody>
@@ -1031,7 +1031,7 @@
           <a:lstStyle/>
           <a:p>
             <a:r>
-              <a:t>As you can see on the diagram, A lies to the left and B lies to the right on the number line, with a gap in between where the square root of 2 should be. But since the square root of 2 is not rational, it does not belong to either set. There is a genuine hole between A and B.</a:t>
+              <a:t>As you can see on the diagram, "A" lies to the left and "B" lies to the right on the number line, with a gap in between where the square root of 2 should be. But since the square root of 2 is not rational, it does not belong to either set. There is a genuine hole between "A" and "B".</a:t>
             </a:r>
           </a:p>
         </p:txBody>
@@ -1101,7 +1101,7 @@
           <a:lstStyle/>
           <a:p>
             <a:r>
-              <a:t>The crucial claim is that A has no largest element and B has no smallest element. This means there is no rational number sitting right at the boundary of this gap. No matter how close you get to the square root of 2 from either side, you can always get closer while staying within the rationals. The gap is real and cannot be plugged using rationals alone. Let's see how Rudin proves this claim.</a:t>
+              <a:t>The crucial claim is that "A" has no largest element and "B" has no smallest element. This means there is no rational number sitting right at the boundary of this gap. No matter how close you get to the square root of 2 from either side, you can always get closer while staying within the rationals. The gap is real and cannot be plugged using rationals alone. Let's see how Rudin proves this claim.</a:t>
             </a:r>
           </a:p>
         </p:txBody>
@@ -1171,7 +1171,7 @@
           <a:lstStyle/>
           <a:p>
             <a:r>
-              <a:t>To prove the claim, Rudin introduces a clever construction. Given any positive rational p, he defines a new rational q by the formula: q equals p minus the quantity p squared minus 2, divided by p plus 2. This simplifies to 2 p plus 2, all divided by p plus 2. The idea is that q is a rational number that is closer to the square root of 2 than p is, while remaining on the same side of the square root of 2 as p. Let's see why this works.</a:t>
+              <a:t>To prove the claim, Rudin introduces a clever construction. Given any positive rational "p", he defines a new rational "q" by the formula: "q" equals "p" minus the quantity "p" squared minus 2, divided by "p" plus 2. This simplifies to 2 "p" plus 2, all divided by "p" plus 2. The idea is that "q" is a rational number that is closer to the square root of 2 than "p" is, while remaining on the same side of the square root of 2 as "p". Let's see why this works.</a:t>
             </a:r>
           </a:p>
         </p:txBody>
@@ -1241,7 +1241,7 @@
           <a:lstStyle/>
           <a:p>
             <a:r>
-              <a:t>The crucial algebraic identity, equation 4, shows that q squared minus 2 equals 2 times p squared minus 2, divided by p plus 2 squared. Since p plus 2 squared is always positive, this tells us that q squared minus 2 has the same sign as p squared minus 2. This is the engine that drives the whole argument. If p is in A, then q will also be in A. If p is in B, then q will also be in B.</a:t>
+              <a:t>The crucial algebraic identity, equation 4, shows that "q" squared minus 2 equals 2 times "p" squared minus 2, divided by "p" plus 2 squared. Since "p" plus 2 squared is always positive, this tells us that "q" squared minus 2 has the same sign as "p" squared minus 2. This is the engine that drives the whole argument. If "p" is in "A", then "q" will also be in "A". If "p" is in "B", then "q" will also be in "B".</a:t>
             </a:r>
           </a:p>
         </p:txBody>
@@ -1381,7 +1381,7 @@
           <a:lstStyle/>
           <a:p>
             <a:r>
-              <a:t>Let's apply the construction. First, suppose p is in A, meaning p squared is less than 2. Then p squared minus 2 is negative. Looking at equation 3, we are subtracting a negative number from p, so q is greater than p. And from equation 4, q squared minus 2 is also negative, meaning q squared is less than 2, so q is also in A. We have found a rational in A that is strictly larger than p, so p cannot be the largest element of A.</a:t>
+              <a:t>Let's apply the construction. First, suppose "p" is in "A", meaning "p" squared is less than 2. Then "p" squared minus 2 is negative. Looking at equation 3, we are subtracting a negative number from "p", so "q" is greater than "p". And from equation 4, "q" squared minus 2 is also negative, meaning "q" squared is less than 2, so "q" is also in "A". We have found a rational in "A" that is strictly larger than "p", so "p" cannot be the largest element of "A".</a:t>
             </a:r>
           </a:p>
         </p:txBody>
@@ -1451,7 +1451,7 @@
           <a:lstStyle/>
           <a:p>
             <a:r>
-              <a:t>Now suppose p is in B, meaning p squared is greater than 2. Then p squared minus 2 is positive. From equation 3, q is less than p but still positive. From equation 4, q squared minus 2 is positive, so q is in B. We have found a rational in B strictly smaller than p, so p is not the smallest element of B. Now let's put these two cases together.</a:t>
+              <a:t>Now suppose "p" is in "B", meaning "p" squared is greater than 2. Then "p" squared minus 2 is positive. From equation 3, "q" is less than "p" but still positive. From equation 4, "q" squared minus 2 is positive, so "q" is in "B". We have found a rational in "B" strictly smaller than "p", so "p" is not the smallest element of "B". Now let's put these two cases together.</a:t>
             </a:r>
           </a:p>
         </p:txBody>
@@ -1521,7 +1521,7 @@
           <a:lstStyle/>
           <a:p>
             <a:r>
-              <a:t>Since p was arbitrary in each case, A has no maximum and B has no minimum. This is the gap in the rationals. There is no rational number at the boundary between A and B. The square root of 2 should be there, but it simply does not exist in the rational number system.</a:t>
+              <a:t>Since "p" was arbitrary in each case, "A" has no maximum and "B" has no minimum. This is the gap in the rationals. There is no rational number at the boundary between "A" and "B". The square root of 2 should be there, but it simply does not exist in the rational number system.</a:t>
             </a:r>
           </a:p>
         </p:txBody>
@@ -1591,7 +1591,7 @@
           <a:lstStyle/>
           <a:p>
             <a:r>
-              <a:t>Remark 1.2 captures the philosophical lesson of Example 1.1. The rationals are dense: between any two rationals r and s, the average r plus s over 2 is another rational strictly between them. So in some sense, the rationals are spread everywhere on the number line. Yet they still have gaps. The set A has no maximum, the set B has no minimum, and there is nothing in the rationals sitting between them.</a:t>
+              <a:t>Remark 1.2 captures the philosophical lesson of Example 1.1. The rationals are dense: between any two rationals "r" and "s", the average "r" plus "s" over 2 is another rational strictly between them. So in some sense, the rationals are spread everywhere on the number line. Yet they still have gaps. The set "A" has no maximum, the set "B" has no minimum, and there is nothing in the rationals sitting between them.</a:t>
             </a:r>
           </a:p>
         </p:txBody>
@@ -1731,7 +1731,7 @@
           <a:lstStyle/>
           <a:p>
             <a:r>
-              <a:t>Now Rudin introduces the standard set-theoretic terminology that will be used throughout the book. If A is any set, whose elements may be numbers or any other objects, we write x belongs to A to indicate that x is a member, or element, of A. If x is not a member of A, we write x does not belong to A.</a:t>
+              <a:t>Now Rudin introduces the standard set-theoretic terminology that will be used throughout the book. If "A" is any set, whose elements may be numbers or any other objects, we write "x" belongs to "A" to indicate that "x" is a member, or element, of "A". If "x" is not a member of "A", we write "x" does not belong to "A".</a:t>
             </a:r>
           </a:p>
         </p:txBody>
@@ -1871,7 +1871,7 @@
           <a:lstStyle/>
           <a:p>
             <a:r>
-              <a:t>Next, if A and B are sets, and if every element of A is an element of B, we say that A is a subset of B, and write A subset B. If in addition there is an element of B which is not in A, then A is said to be a proper subset of B. Note that A is a subset of A for every set A, since trivially every element of A is an element of A. This subset relation leads naturally to the definition of set equality.</a:t>
+              <a:t>Next, if "A" and "B" are sets, and if every element of "A" is an element of "B", we say that "A" is a subset of "B", and write "A" subset "B". If in addition there is an element of "B" which is not in "A", then "A" is said to be a proper subset of "B". Note that "A" is a subset of "A" for every set "A", since trivially every element of "A" is an element of "A". This subset relation leads naturally to the definition of set equality.</a:t>
             </a:r>
           </a:p>
         </p:txBody>
@@ -1941,7 +1941,7 @@
           <a:lstStyle/>
           <a:p>
             <a:r>
-              <a:t>Two sets A and B are defined to be equal if A is a subset of B and B is a subset of A. In other words, they contain exactly the same elements. Otherwise, they are not equal. As you can see in the diagram on the left, when A is a proper subset of B, A sits strictly inside B, and there is at least one element in B that is not in A. On the right, when A equals B, the two sets coincide completely. This double-inclusion method of proving set equality, showing that each is a subset of the other, is one of the most common proof techniques in analysis.</a:t>
+              <a:t>Two sets "A" and "B" are defined to be equal if "A" is a subset of "B" and "B" is a subset of "A". In other words, they contain exactly the same elements. Otherwise, they are not equal. As you can see in the diagram on the left, when "A" is a proper subset of "B", "A" sits strictly inside "B", and there is at least one element in "B" that is not in "A". On the right, when "A" equals "B", the two sets coincide completely. This double-inclusion method of proving set equality, showing that each is a subset of the other, is one of the most common proof techniques in analysis.</a:t>
             </a:r>
           </a:p>
         </p:txBody>
@@ -2011,7 +2011,7 @@
           <a:lstStyle/>
           <a:p>
             <a:r>
-              <a:t>Definition 1.4 simply establishes notation: the letter Q will denote the set of all rational numbers throughout Chapter 1. These are all numbers of the form m over n, where m and n are integers and n is not zero. Rudin uses a plain Q without the blackboard bold styling, but we will use the modern notation, blackboard bold Q, interchangeably. This is our starting point, and the rest of the chapter builds from here.</a:t>
+              <a:t>Definition 1.4 simply establishes notation: the letter "Q" will denote the set of all rational numbers throughout Chapter 1. These are all numbers of the form "m" over "n", where "m" and "n" are integers and "n" is not zero. Rudin uses a plain "Q" without the blackboard bold styling, but we will use the modern notation, blackboard bold "Q", interchangeably. This is our starting point, and the rest of the chapter builds from here.</a:t>
             </a:r>
           </a:p>
         </p:txBody>
@@ -2291,7 +2291,7 @@
           <a:lstStyle/>
           <a:p>
             <a:r>
-              <a:t>We proved in Example 1.1 that the square root of 2 is irrational, using a classic proof by contradiction. If p squared equals 2 and p equals m over n, then both m and n must be even, contradicting our assumption.</a:t>
+              <a:t>We proved in Example 1.1 that the square root of 2 is irrational, using a classic proof by contradiction. If "p" squared equals 2 and "p" equals "m" over "n", then both "m" and "n" must be even, contradicting our assumption.</a:t>
             </a:r>
           </a:p>
         </p:txBody>
@@ -2361,7 +2361,7 @@
           <a:lstStyle/>
           <a:p>
             <a:r>
-              <a:t>We then saw that the sets A and B of positive rationals whose squares are less than or greater than 2 have a genuine gap between them, with no rational number sitting at the boundary. A has no maximum and B has no minimum.</a:t>
+              <a:t>We then saw that the sets "A" and "B" of positive rationals whose squares are less than or greater than 2 have a genuine gap between them, with no rational number sitting at the boundary. "A" has no maximum and "B" has no minimum.</a:t>
             </a:r>
           </a:p>
         </p:txBody>
@@ -2501,7 +2501,7 @@
           <a:lstStyle/>
           <a:p>
             <a:r>
-              <a:t>Finally, we set up the basic set-theoretic language in Definitions 1.3 and 1.4 that will be used throughout the book: set membership, subsets, proper subsets, set equality, and the notation Q for the rationals. In the next section, we will formalize the notion of order, which is the first step toward understanding the structure of the real numbers.</a:t>
+              <a:t>Finally, we set up the basic set-theoretic language in Definitions 1.3 and 1.4 that will be used throughout the book: set membership, subsets, proper subsets, set equality, and the notation "Q" for the rationals. In the next section, we will formalize the notion of order, which is the first step toward understanding the structure of the real numbers.</a:t>
             </a:r>
           </a:p>
         </p:txBody>
@@ -2571,7 +2571,7 @@
           <a:lstStyle/>
           <a:p>
             <a:r>
-              <a:t>The rational numbers, fractions of the form m over n, might seem like a natural candidate for this foundation. But it turns out that the rational number system is inadequate for many purposes, both as an algebraic structure and as an ordered set. There are fundamental gaps in the rationals that prevent us from doing analysis properly. Let's see the most striking example of this.</a:t>
+              <a:t>The rational numbers, fractions of the form "m" over "n", might seem like a natural candidate for this foundation. But it turns out that the rational number system is inadequate for many purposes, both as an algebraic structure and as an ordered set. There are fundamental gaps in the rationals that prevent us from doing analysis properly. Let's see the most striking example of this.</a:t>
             </a:r>
           </a:p>
         </p:txBody>
@@ -2711,7 +2711,7 @@
           <a:lstStyle/>
           <a:p>
             <a:r>
-              <a:t>Rudin opens the book by stating that we will not go all the way back to the axioms for the integers. We take the rational numbers as given. The rationals are the numbers of the form m over n, where m and n are integers and n is not zero. Now, the rational number system turns out to be inadequate in two senses: as a field, meaning the algebraic structure for doing arithmetic, and as an ordered set, meaning the structure for comparing numbers. These terms will be defined precisely in later sections.</a:t>
+              <a:t>Rudin opens the book by stating that we will not go all the way back to the axioms for the integers. We take the rational numbers as given. The rationals are the numbers of the form "m" over "n", where "m" and "n" are integers and "n" is not zero. Now, the rational number system turns out to be inadequate in two senses: as a field, meaning the algebraic structure for doing arithmetic, and as an ordered set, meaning the structure for comparing numbers. These terms will be defined precisely in later sections.</a:t>
             </a:r>
           </a:p>
         </p:txBody>
@@ -2921,7 +2921,7 @@
           <a:lstStyle/>
           <a:p>
             <a:r>
-              <a:t>Here is the precise statement of Example 1.1: the equation p squared equals 2 is not satisfied by any rational number p. In other words, the square root of 2 is irrational. This is a classic result, and we will prove it using the technique of proof by contradiction. We assume that such a rational p exists, and then show that this leads to an impossible conclusion.</a:t>
+              <a:t>Here is the precise statement of Example 1.1: the equation "p" squared equals 2 is not satisfied by any rational number "p". In other words, the square root of 2 is irrational. This is a classic result, and we will prove it using the technique of proof by contradiction. We assume that such a rational "p" exists, and then show that this leads to an impossible conclusion.</a:t>
             </a:r>
           </a:p>
         </p:txBody>
